--- a/Presentation/Greenfield vs Brownfield.pptx
+++ b/Presentation/Greenfield vs Brownfield.pptx
@@ -3327,7 +3327,7 @@
           </a:prstGeom>
           <a:extLst>
             <a:ext uri="{C572A759-6A51-4108-AA02-DFA0A04FC94B}">
-              <ma14:wrappingTextBoxFlag xmlns:ma14="http://schemas.microsoft.com/office/mac/drawingml/2011/main" xmlns="" val="0"/>
+              <ma14:wrappingTextBoxFlag xmlns="" xmlns:ma14="http://schemas.microsoft.com/office/mac/drawingml/2011/main" val="0"/>
             </a:ext>
           </a:extLst>
         </p:spPr>
@@ -3466,7 +3466,7 @@
           </a:prstGeom>
           <a:extLst>
             <a:ext uri="{C572A759-6A51-4108-AA02-DFA0A04FC94B}">
-              <ma14:wrappingTextBoxFlag xmlns:ma14="http://schemas.microsoft.com/office/mac/drawingml/2011/main" xmlns="" val="0"/>
+              <ma14:wrappingTextBoxFlag xmlns="" xmlns:ma14="http://schemas.microsoft.com/office/mac/drawingml/2011/main" val="0"/>
             </a:ext>
           </a:extLst>
         </p:spPr>
@@ -3544,7 +3544,7 @@
           </a:prstGeom>
           <a:extLst>
             <a:ext uri="{C572A759-6A51-4108-AA02-DFA0A04FC94B}">
-              <ma14:wrappingTextBoxFlag xmlns:ma14="http://schemas.microsoft.com/office/mac/drawingml/2011/main" xmlns="" val="0"/>
+              <ma14:wrappingTextBoxFlag xmlns="" xmlns:ma14="http://schemas.microsoft.com/office/mac/drawingml/2011/main" val="0"/>
             </a:ext>
           </a:extLst>
         </p:spPr>
@@ -4487,7 +4487,7 @@
           </a:prstGeom>
           <a:extLst>
             <a:ext uri="{C572A759-6A51-4108-AA02-DFA0A04FC94B}">
-              <ma14:wrappingTextBoxFlag xmlns:ma14="http://schemas.microsoft.com/office/mac/drawingml/2011/main" xmlns="" val="0"/>
+              <ma14:wrappingTextBoxFlag xmlns="" xmlns:ma14="http://schemas.microsoft.com/office/mac/drawingml/2011/main" val="0"/>
             </a:ext>
           </a:extLst>
         </p:spPr>
@@ -4583,7 +4583,7 @@
                 <a:ea typeface="Calibri" pitchFamily="34" charset="-122"/>
                 <a:cs typeface="Calibri" pitchFamily="34" charset="-120"/>
               </a:rPr>
-              <a:t>Context is about standard, guardrails</a:t>
+              <a:t>Context is about standards, guardrails</a:t>
             </a:r>
           </a:p>
           <a:p>
@@ -4727,7 +4727,7 @@
                 <a:ea typeface="Calibri" pitchFamily="34" charset="-122"/>
                 <a:cs typeface="Calibri" pitchFamily="34" charset="-120"/>
               </a:rPr>
-              <a:t>Context Debt-Brownfield existed before AI</a:t>
+              <a:t>Context Debt-Brownfield existed before AI (Yes, this also applies to LLM prompts, but on a larger scale)</a:t>
             </a:r>
             <a:endParaRPr lang="en-US" sz="1400" dirty="0"/>
           </a:p>
@@ -4877,7 +4877,7 @@
                 <a:ea typeface="Calibri" pitchFamily="34" charset="-122"/>
                 <a:cs typeface="Calibri" pitchFamily="34" charset="-120"/>
               </a:rPr>
-              <a:t>Start with a systemic approach to context debt</a:t>
+              <a:t>You need a systemic approach to managing context debt</a:t>
             </a:r>
             <a:endParaRPr lang="en-US" sz="3200" dirty="0"/>
           </a:p>
@@ -4909,7 +4909,7 @@
           </a:prstGeom>
           <a:extLst>
             <a:ext uri="{C572A759-6A51-4108-AA02-DFA0A04FC94B}">
-              <ma14:wrappingTextBoxFlag xmlns="" xmlns:ma14="http://schemas.microsoft.com/office/mac/drawingml/2011/main" val="0"/>
+              <ma14:wrappingTextBoxFlag xmlns:ma14="http://schemas.microsoft.com/office/mac/drawingml/2011/main" xmlns="" val="0"/>
             </a:ext>
           </a:extLst>
         </p:spPr>
@@ -5413,7 +5413,7 @@
           </a:prstGeom>
           <a:extLst>
             <a:ext uri="{C572A759-6A51-4108-AA02-DFA0A04FC94B}">
-              <ma14:wrappingTextBoxFlag xmlns="" xmlns:ma14="http://schemas.microsoft.com/office/mac/drawingml/2011/main" val="0"/>
+              <ma14:wrappingTextBoxFlag xmlns:ma14="http://schemas.microsoft.com/office/mac/drawingml/2011/main" xmlns="" val="0"/>
             </a:ext>
           </a:extLst>
         </p:spPr>
@@ -5645,6 +5645,17 @@
               <a:buNone/>
             </a:pPr>
             <a:r>
+              <a:rPr lang="en-US" sz="1400" b="1" kern="0" spc="400">
+                <a:solidFill>
+                  <a:srgbClr val="381D92"/>
+                </a:solidFill>
+                <a:latin typeface="Calibri" pitchFamily="34" charset="0"/>
+                <a:ea typeface="Calibri" pitchFamily="34" charset="-122"/>
+                <a:cs typeface="Calibri" pitchFamily="34" charset="-120"/>
+              </a:rPr>
+              <a:t>Ownership </a:t>
+            </a:r>
+            <a:r>
               <a:rPr lang="en-US" sz="1400" b="1" kern="0" spc="400" dirty="0">
                 <a:solidFill>
                   <a:srgbClr val="381D92"/>
@@ -5653,7 +5664,7 @@
                 <a:ea typeface="Calibri" pitchFamily="34" charset="-122"/>
                 <a:cs typeface="Calibri" pitchFamily="34" charset="-120"/>
               </a:rPr>
-              <a:t>Context Debt-Ownership in Brownfield vs Greenfield</a:t>
+              <a:t>in Brownfield vs Greenfield</a:t>
             </a:r>
             <a:endParaRPr lang="en-US" sz="1400" dirty="0"/>
           </a:p>
@@ -5864,7 +5875,7 @@
           </a:prstGeom>
           <a:extLst>
             <a:ext uri="{C572A759-6A51-4108-AA02-DFA0A04FC94B}">
-              <ma14:wrappingTextBoxFlag xmlns:ma14="http://schemas.microsoft.com/office/mac/drawingml/2011/main" xmlns="" val="0"/>
+              <ma14:wrappingTextBoxFlag xmlns="" xmlns:ma14="http://schemas.microsoft.com/office/mac/drawingml/2011/main" val="0"/>
             </a:ext>
           </a:extLst>
         </p:spPr>
@@ -6374,7 +6385,7 @@
           </a:prstGeom>
           <a:extLst>
             <a:ext uri="{C572A759-6A51-4108-AA02-DFA0A04FC94B}">
-              <ma14:wrappingTextBoxFlag xmlns:ma14="http://schemas.microsoft.com/office/mac/drawingml/2011/main" xmlns="" val="0"/>
+              <ma14:wrappingTextBoxFlag xmlns="" xmlns:ma14="http://schemas.microsoft.com/office/mac/drawingml/2011/main" val="0"/>
             </a:ext>
           </a:extLst>
         </p:spPr>
@@ -6677,7 +6688,7 @@
           </a:prstGeom>
           <a:extLst>
             <a:ext uri="{C572A759-6A51-4108-AA02-DFA0A04FC94B}">
-              <ma14:wrappingTextBoxFlag xmlns="" xmlns:ma14="http://schemas.microsoft.com/office/mac/drawingml/2011/main" val="0"/>
+              <ma14:wrappingTextBoxFlag xmlns:ma14="http://schemas.microsoft.com/office/mac/drawingml/2011/main" xmlns="" val="0"/>
             </a:ext>
           </a:extLst>
         </p:spPr>
@@ -6808,8 +6819,40 @@
                 <a:ea typeface="Calibri" pitchFamily="34" charset="-122"/>
                 <a:cs typeface="Calibri" pitchFamily="34" charset="-120"/>
               </a:rPr>
-              <a:t>Create code</a:t>
-            </a:r>
+              <a:t>Create code </a:t>
+            </a:r>
+            <a:r>
+              <a:rPr lang="en-US" sz="1600" dirty="0">
+                <a:solidFill>
+                  <a:srgbClr val="0B0620"/>
+                </a:solidFill>
+                <a:latin typeface="Calibri" pitchFamily="34" charset="0"/>
+                <a:ea typeface="Calibri" pitchFamily="34" charset="-122"/>
+                <a:cs typeface="Calibri" pitchFamily="34" charset="-120"/>
+                <a:sym typeface="Wingdings" panose="05000000000000000000" pitchFamily="2" charset="2"/>
+              </a:rPr>
+              <a:t> </a:t>
+            </a:r>
+            <a:r>
+              <a:rPr lang="en-US" sz="1600" i="1" dirty="0">
+                <a:solidFill>
+                  <a:srgbClr val="0B0620"/>
+                </a:solidFill>
+                <a:latin typeface="Calibri" pitchFamily="34" charset="0"/>
+                <a:ea typeface="Calibri" pitchFamily="34" charset="-122"/>
+                <a:cs typeface="Calibri" pitchFamily="34" charset="-120"/>
+                <a:sym typeface="Wingdings" panose="05000000000000000000" pitchFamily="2" charset="2"/>
+              </a:rPr>
+              <a:t>the only step the AI controls</a:t>
+            </a:r>
+            <a:endParaRPr lang="en-US" sz="1600" i="1" dirty="0">
+              <a:solidFill>
+                <a:srgbClr val="0B0620"/>
+              </a:solidFill>
+              <a:latin typeface="Calibri" pitchFamily="34" charset="0"/>
+              <a:ea typeface="Calibri" pitchFamily="34" charset="-122"/>
+              <a:cs typeface="Calibri" pitchFamily="34" charset="-120"/>
+            </a:endParaRPr>
           </a:p>
           <a:p>
             <a:pPr marL="342900" indent="-342900">
@@ -7084,7 +7127,7 @@
                 <a:ea typeface="Calibri" pitchFamily="34" charset="-122"/>
                 <a:cs typeface="Calibri" pitchFamily="34" charset="-120"/>
               </a:rPr>
-              <a:t>This differences defined the central tension that created this presentation</a:t>
+              <a:t>This is why Brownfield feels slow</a:t>
             </a:r>
             <a:endParaRPr lang="en-US" sz="3200" dirty="0"/>
           </a:p>
@@ -7116,7 +7159,7 @@
           </a:prstGeom>
           <a:extLst>
             <a:ext uri="{C572A759-6A51-4108-AA02-DFA0A04FC94B}">
-              <ma14:wrappingTextBoxFlag xmlns:ma14="http://schemas.microsoft.com/office/mac/drawingml/2011/main" xmlns="" val="0"/>
+              <ma14:wrappingTextBoxFlag xmlns="" xmlns:ma14="http://schemas.microsoft.com/office/mac/drawingml/2011/main" val="0"/>
             </a:ext>
           </a:extLst>
         </p:spPr>
@@ -7320,7 +7363,7 @@
                 <a:ea typeface="Calibri" pitchFamily="34" charset="-122"/>
                 <a:cs typeface="Calibri" pitchFamily="34" charset="-120"/>
               </a:rPr>
-              <a:t>Repeatability</a:t>
+              <a:t>Repeatability: Same situation, same prompts, same results.</a:t>
             </a:r>
             <a:endParaRPr lang="en-US" sz="1400" dirty="0"/>
           </a:p>
@@ -7473,7 +7516,7 @@
           </a:prstGeom>
           <a:extLst>
             <a:ext uri="{C572A759-6A51-4108-AA02-DFA0A04FC94B}">
-              <ma14:wrappingTextBoxFlag xmlns:ma14="http://schemas.microsoft.com/office/mac/drawingml/2011/main" xmlns="" val="0"/>
+              <ma14:wrappingTextBoxFlag xmlns="" xmlns:ma14="http://schemas.microsoft.com/office/mac/drawingml/2011/main" val="0"/>
             </a:ext>
           </a:extLst>
         </p:spPr>
@@ -7671,7 +7714,7 @@
                 <a:ea typeface="Calibri" pitchFamily="34" charset="-122"/>
                 <a:cs typeface="Calibri" pitchFamily="34" charset="-120"/>
               </a:rPr>
-              <a:t>Before the work</a:t>
+              <a:t>Before the agents fly</a:t>
             </a:r>
             <a:endParaRPr lang="en-US" sz="1400" dirty="0"/>
           </a:p>
@@ -7824,7 +7867,7 @@
           </a:prstGeom>
           <a:extLst>
             <a:ext uri="{C572A759-6A51-4108-AA02-DFA0A04FC94B}">
-              <ma14:wrappingTextBoxFlag xmlns:ma14="http://schemas.microsoft.com/office/mac/drawingml/2011/main" xmlns="" val="0"/>
+              <ma14:wrappingTextBoxFlag xmlns="" xmlns:ma14="http://schemas.microsoft.com/office/mac/drawingml/2011/main" val="0"/>
             </a:ext>
           </a:extLst>
         </p:spPr>
@@ -8399,7 +8442,7 @@
           </a:prstGeom>
           <a:extLst>
             <a:ext uri="{C572A759-6A51-4108-AA02-DFA0A04FC94B}">
-              <ma14:wrappingTextBoxFlag xmlns:ma14="http://schemas.microsoft.com/office/mac/drawingml/2011/main" xmlns="" val="0"/>
+              <ma14:wrappingTextBoxFlag xmlns="" xmlns:ma14="http://schemas.microsoft.com/office/mac/drawingml/2011/main" val="0"/>
             </a:ext>
           </a:extLst>
         </p:spPr>
@@ -8687,7 +8730,7 @@
           </a:prstGeom>
           <a:extLst>
             <a:ext uri="{C572A759-6A51-4108-AA02-DFA0A04FC94B}">
-              <ma14:wrappingTextBoxFlag xmlns:ma14="http://schemas.microsoft.com/office/mac/drawingml/2011/main" xmlns="" val="0"/>
+              <ma14:wrappingTextBoxFlag xmlns="" xmlns:ma14="http://schemas.microsoft.com/office/mac/drawingml/2011/main" val="0"/>
             </a:ext>
           </a:extLst>
         </p:spPr>
@@ -8792,7 +8835,7 @@
                 <a:ea typeface="Calibri" pitchFamily="34" charset="-122"/>
                 <a:cs typeface="Calibri" pitchFamily="34" charset="-120"/>
               </a:rPr>
-              <a:t>.  Use claude.md to establish guardrails and evaluate previous decisions as documented in memory1.md, ard.md, etc.  If you have any questions, ask and record ard2.md.</a:t>
+              <a:t>.  Use claude.md and the project-specific file myproject.md to establish guardrails and evaluate previous decisions as documented in memory1.md, ard.md, etc.  If you have any questions, ask and record ard2.md.</a:t>
             </a:r>
           </a:p>
           <a:p>
@@ -9093,7 +9136,7 @@
                 <a:ea typeface="Calibri" pitchFamily="34" charset="-122"/>
                 <a:cs typeface="Calibri" pitchFamily="34" charset="-120"/>
               </a:rPr>
-              <a:t>This is where differences start to get real</a:t>
+              <a:t>This is where AI-enabled development starts to feel like the olden days</a:t>
             </a:r>
             <a:endParaRPr lang="en-US" sz="3200" dirty="0"/>
           </a:p>
@@ -9125,7 +9168,7 @@
           </a:prstGeom>
           <a:extLst>
             <a:ext uri="{C572A759-6A51-4108-AA02-DFA0A04FC94B}">
-              <ma14:wrappingTextBoxFlag xmlns:ma14="http://schemas.microsoft.com/office/mac/drawingml/2011/main" xmlns="" val="0"/>
+              <ma14:wrappingTextBoxFlag xmlns="" xmlns:ma14="http://schemas.microsoft.com/office/mac/drawingml/2011/main" val="0"/>
             </a:ext>
           </a:extLst>
         </p:spPr>
@@ -9518,7 +9561,7 @@
                 <a:ea typeface="Calibri" pitchFamily="34" charset="-122"/>
                 <a:cs typeface="Calibri" pitchFamily="34" charset="-120"/>
               </a:rPr>
-              <a:t>This differences get bigger here</a:t>
+              <a:t>Brownfield almost always has them because the software lives in an eco system</a:t>
             </a:r>
             <a:endParaRPr lang="en-US" sz="3200" dirty="0"/>
           </a:p>
@@ -9550,7 +9593,7 @@
           </a:prstGeom>
           <a:extLst>
             <a:ext uri="{C572A759-6A51-4108-AA02-DFA0A04FC94B}">
-              <ma14:wrappingTextBoxFlag xmlns:ma14="http://schemas.microsoft.com/office/mac/drawingml/2011/main" xmlns="" val="0"/>
+              <ma14:wrappingTextBoxFlag xmlns="" xmlns:ma14="http://schemas.microsoft.com/office/mac/drawingml/2011/main" val="0"/>
             </a:ext>
           </a:extLst>
         </p:spPr>
@@ -10269,7 +10312,7 @@
           </a:prstGeom>
           <a:extLst>
             <a:ext uri="{C572A759-6A51-4108-AA02-DFA0A04FC94B}">
-              <ma14:wrappingTextBoxFlag xmlns:ma14="http://schemas.microsoft.com/office/mac/drawingml/2011/main" xmlns="" val="0"/>
+              <ma14:wrappingTextBoxFlag xmlns="" xmlns:ma14="http://schemas.microsoft.com/office/mac/drawingml/2011/main" val="0"/>
             </a:ext>
           </a:extLst>
         </p:spPr>
@@ -10556,7 +10599,7 @@
           </a:prstGeom>
           <a:extLst>
             <a:ext uri="{C572A759-6A51-4108-AA02-DFA0A04FC94B}">
-              <ma14:wrappingTextBoxFlag xmlns:ma14="http://schemas.microsoft.com/office/mac/drawingml/2011/main" xmlns="" val="0"/>
+              <ma14:wrappingTextBoxFlag xmlns="" xmlns:ma14="http://schemas.microsoft.com/office/mac/drawingml/2011/main" val="0"/>
             </a:ext>
           </a:extLst>
         </p:spPr>
@@ -11204,7 +11247,7 @@
           </a:prstGeom>
           <a:extLst>
             <a:ext uri="{C572A759-6A51-4108-AA02-DFA0A04FC94B}">
-              <ma14:wrappingTextBoxFlag xmlns:ma14="http://schemas.microsoft.com/office/mac/drawingml/2011/main" xmlns="" val="0"/>
+              <ma14:wrappingTextBoxFlag xmlns="" xmlns:ma14="http://schemas.microsoft.com/office/mac/drawingml/2011/main" val="0"/>
             </a:ext>
           </a:extLst>
         </p:spPr>
@@ -11374,24 +11417,53 @@
             <a:endParaRPr lang="en-US" sz="1400" dirty="0"/>
           </a:p>
           <a:p>
-            <a:pPr marL="0" indent="0">
-              <a:buNone/>
-            </a:pPr>
             <a:r>
               <a:rPr lang="en-US" sz="1400" dirty="0">
                 <a:solidFill>
-                  <a:srgbClr val="F2F2FA"/>
-                </a:solidFill>
-                <a:latin typeface="Calibri" pitchFamily="34" charset="0"/>
-                <a:ea typeface="Calibri" pitchFamily="34" charset="-122"/>
-                <a:cs typeface="Calibri" pitchFamily="34" charset="-120"/>
-              </a:rPr>
-              <a:t>Founder</a:t>
-            </a:r>
+                  <a:schemeClr val="bg1"/>
+                </a:solidFill>
+              </a:rPr>
+              <a:t>https://github.com/CommonDialog/AgentConRaleigh2026</a:t>
+            </a:r>
+          </a:p>
+          <a:p>
+            <a:pPr marL="0" indent="0">
+              <a:buNone/>
+            </a:pPr>
             <a:endParaRPr lang="en-US" sz="1400" dirty="0"/>
           </a:p>
         </p:txBody>
       </p:sp>
+      <p:pic>
+        <p:nvPicPr>
+          <p:cNvPr id="6" name="Picture 5">
+            <a:extLst>
+              <a:ext uri="{FF2B5EF4-FFF2-40B4-BE49-F238E27FC236}">
+                <a16:creationId xmlns:a16="http://schemas.microsoft.com/office/drawing/2014/main" id="{106E1EC4-F40F-EE40-2944-17C6FC9CA357}"/>
+              </a:ext>
+            </a:extLst>
+          </p:cNvPr>
+          <p:cNvPicPr>
+            <a:picLocks noChangeAspect="1"/>
+          </p:cNvPicPr>
+          <p:nvPr/>
+        </p:nvPicPr>
+        <p:blipFill>
+          <a:blip r:embed="rId3"/>
+          <a:stretch>
+            <a:fillRect/>
+          </a:stretch>
+        </p:blipFill>
+        <p:spPr>
+          <a:xfrm>
+            <a:off x="5146163" y="1069948"/>
+            <a:ext cx="3299077" cy="3248321"/>
+          </a:xfrm>
+          <a:prstGeom prst="rect">
+            <a:avLst/>
+          </a:prstGeom>
+        </p:spPr>
+      </p:pic>
     </p:spTree>
   </p:cSld>
   <p:clrMapOvr>
@@ -11983,7 +12055,7 @@
           </a:prstGeom>
           <a:extLst>
             <a:ext uri="{C572A759-6A51-4108-AA02-DFA0A04FC94B}">
-              <ma14:wrappingTextBoxFlag xmlns="" xmlns:ma14="http://schemas.microsoft.com/office/mac/drawingml/2011/main" val="0"/>
+              <ma14:wrappingTextBoxFlag xmlns:ma14="http://schemas.microsoft.com/office/mac/drawingml/2011/main" xmlns="" val="0"/>
             </a:ext>
           </a:extLst>
         </p:spPr>
@@ -12234,7 +12306,7 @@
           </a:prstGeom>
           <a:extLst>
             <a:ext uri="{C572A759-6A51-4108-AA02-DFA0A04FC94B}">
-              <ma14:wrappingTextBoxFlag xmlns:ma14="http://schemas.microsoft.com/office/mac/drawingml/2011/main" xmlns="" val="0"/>
+              <ma14:wrappingTextBoxFlag xmlns="" xmlns:ma14="http://schemas.microsoft.com/office/mac/drawingml/2011/main" val="0"/>
             </a:ext>
           </a:extLst>
         </p:spPr>
@@ -12999,6 +13071,26 @@
               </a:rPr>
               <a:t>Shorthand for enterprise software</a:t>
             </a:r>
+          </a:p>
+          <a:p>
+            <a:pPr marL="342900" indent="-342900">
+              <a:spcAft>
+                <a:spcPts val="1000"/>
+              </a:spcAft>
+              <a:buSzPct val="100000"/>
+              <a:buChar char="•"/>
+            </a:pPr>
+            <a:r>
+              <a:rPr lang="en-US" sz="1600" dirty="0">
+                <a:solidFill>
+                  <a:srgbClr val="0B0620"/>
+                </a:solidFill>
+                <a:latin typeface="Calibri" pitchFamily="34" charset="0"/>
+                <a:ea typeface="Calibri" pitchFamily="34" charset="-122"/>
+                <a:cs typeface="Calibri" pitchFamily="34" charset="-120"/>
+              </a:rPr>
+              <a:t>Legacy software</a:t>
+            </a:r>
             <a:endParaRPr lang="en-US" sz="1600" dirty="0"/>
           </a:p>
           <a:p>
@@ -13283,7 +13375,7 @@
           </a:prstGeom>
           <a:extLst>
             <a:ext uri="{C572A759-6A51-4108-AA02-DFA0A04FC94B}">
-              <ma14:wrappingTextBoxFlag xmlns:ma14="http://schemas.microsoft.com/office/mac/drawingml/2011/main" xmlns="" val="0"/>
+              <ma14:wrappingTextBoxFlag xmlns="" xmlns:ma14="http://schemas.microsoft.com/office/mac/drawingml/2011/main" val="0"/>
             </a:ext>
           </a:extLst>
         </p:spPr>
@@ -13757,7 +13849,7 @@
           </a:prstGeom>
           <a:extLst>
             <a:ext uri="{C572A759-6A51-4108-AA02-DFA0A04FC94B}">
-              <ma14:wrappingTextBoxFlag xmlns:ma14="http://schemas.microsoft.com/office/mac/drawingml/2011/main" xmlns="" val="0"/>
+              <ma14:wrappingTextBoxFlag xmlns="" xmlns:ma14="http://schemas.microsoft.com/office/mac/drawingml/2011/main" val="0"/>
             </a:ext>
           </a:extLst>
         </p:spPr>
@@ -14049,7 +14141,7 @@
           </a:prstGeom>
           <a:extLst>
             <a:ext uri="{C572A759-6A51-4108-AA02-DFA0A04FC94B}">
-              <ma14:wrappingTextBoxFlag xmlns:ma14="http://schemas.microsoft.com/office/mac/drawingml/2011/main" xmlns="" val="0"/>
+              <ma14:wrappingTextBoxFlag xmlns="" xmlns:ma14="http://schemas.microsoft.com/office/mac/drawingml/2011/main" val="0"/>
             </a:ext>
           </a:extLst>
         </p:spPr>
